--- a/outputs/presentation/dev-transformation-summary-mid.pptx
+++ b/outputs/presentation/dev-transformation-summary-mid.pptx
@@ -924,7 +924,7 @@
             </a:avLst>
           </a:prstGeom>
           <a:solidFill>
-            <a:srgbClr val="E6F4F4"/>
+            <a:srgbClr val="EFF3F5"/>
           </a:solidFill>
           <a:ln/>
         </p:spPr>
@@ -938,7 +938,7 @@
             <a:r>
               <a:rPr lang="en-US" sz="1400" b="1" dirty="0">
                 <a:solidFill>
-                  <a:srgbClr val="028090"/>
+                  <a:srgbClr val="5A7184"/>
                 </a:solidFill>
                 <a:latin typeface="Malgun Gothic" pitchFamily="34" charset="0"/>
                 <a:ea typeface="Malgun Gothic" pitchFamily="34" charset="-122"/>
@@ -1037,15 +1037,15 @@
         <p:spPr>
           <a:xfrm>
             <a:off x="457200" y="859536"/>
-            <a:ext cx="11274552" cy="530352"/>
+            <a:ext cx="11274552" cy="512064"/>
           </a:xfrm>
           <a:prstGeom prst="roundRect">
             <a:avLst>
-              <a:gd name="adj" fmla="val 15517"/>
+              <a:gd name="adj" fmla="val 16071"/>
             </a:avLst>
           </a:prstGeom>
           <a:solidFill>
-            <a:srgbClr val="E8F6F0"/>
+            <a:srgbClr val="F5F7F8"/>
           </a:solidFill>
           <a:ln/>
         </p:spPr>
@@ -1079,16 +1079,16 @@
         </p:nvSpPr>
         <p:spPr>
           <a:xfrm>
-            <a:off x="457200" y="1554480"/>
-            <a:ext cx="5477256" cy="2011680"/>
+            <a:off x="457200" y="1517904"/>
+            <a:ext cx="5477256" cy="1865376"/>
           </a:xfrm>
           <a:prstGeom prst="roundRect">
             <a:avLst>
-              <a:gd name="adj" fmla="val 4091"/>
+              <a:gd name="adj" fmla="val 4412"/>
             </a:avLst>
           </a:prstGeom>
           <a:solidFill>
-            <a:srgbClr val="EAF3FA"/>
+            <a:srgbClr val="F5F7F8"/>
           </a:solidFill>
           <a:ln/>
         </p:spPr>
@@ -1101,14 +1101,14 @@
         </p:nvSpPr>
         <p:spPr>
           <a:xfrm>
-            <a:off x="640080" y="1700784"/>
+            <a:off x="640080" y="1645920"/>
             <a:ext cx="329184" cy="329184"/>
           </a:xfrm>
           <a:prstGeom prst="ellipse">
             <a:avLst/>
           </a:prstGeom>
           <a:solidFill>
-            <a:srgbClr val="0E6BA8"/>
+            <a:srgbClr val="17313B"/>
           </a:solidFill>
           <a:ln/>
         </p:spPr>
@@ -1142,7 +1142,7 @@
         </p:nvSpPr>
         <p:spPr>
           <a:xfrm>
-            <a:off x="1060704" y="1673352"/>
+            <a:off x="1060704" y="1618488"/>
             <a:ext cx="4206240" cy="365760"/>
           </a:xfrm>
           <a:prstGeom prst="rect">
@@ -1161,7 +1161,7 @@
             <a:r>
               <a:rPr lang="en-US" sz="1900" b="1" dirty="0">
                 <a:solidFill>
-                  <a:srgbClr val="0E6BA8"/>
+                  <a:srgbClr val="17313B"/>
                 </a:solidFill>
                 <a:latin typeface="Malgun Gothic" pitchFamily="34" charset="0"/>
                 <a:ea typeface="Malgun Gothic" pitchFamily="34" charset="-122"/>
@@ -1181,16 +1181,16 @@
         </p:nvSpPr>
         <p:spPr>
           <a:xfrm>
-            <a:off x="713232" y="2157984"/>
-            <a:ext cx="1463040" cy="786384"/>
+            <a:off x="713232" y="2048256"/>
+            <a:ext cx="1463040" cy="749808"/>
           </a:xfrm>
           <a:prstGeom prst="roundRect">
             <a:avLst>
-              <a:gd name="adj" fmla="val 8140"/>
+              <a:gd name="adj" fmla="val 8537"/>
             </a:avLst>
           </a:prstGeom>
           <a:solidFill>
-            <a:srgbClr val="C7D5DE"/>
+            <a:srgbClr val="E7ECEF"/>
           </a:solidFill>
           <a:ln/>
         </p:spPr>
@@ -1241,8 +1241,8 @@
         </p:nvSpPr>
         <p:spPr>
           <a:xfrm>
-            <a:off x="2157984" y="2157984"/>
-            <a:ext cx="274320" cy="786384"/>
+            <a:off x="2157984" y="2048256"/>
+            <a:ext cx="274320" cy="749808"/>
           </a:xfrm>
           <a:prstGeom prst="rect">
             <a:avLst/>
@@ -1260,7 +1260,7 @@
             <a:r>
               <a:rPr lang="en-US" sz="1400" dirty="0">
                 <a:solidFill>
-                  <a:srgbClr val="0E6BA8"/>
+                  <a:srgbClr val="5A7184"/>
                 </a:solidFill>
                 <a:latin typeface="Malgun Gothic" pitchFamily="34" charset="0"/>
                 <a:ea typeface="Malgun Gothic" pitchFamily="34" charset="-122"/>
@@ -1280,16 +1280,16 @@
         </p:nvSpPr>
         <p:spPr>
           <a:xfrm>
-            <a:off x="2414016" y="2157984"/>
-            <a:ext cx="1463040" cy="786384"/>
+            <a:off x="2414016" y="2048256"/>
+            <a:ext cx="1463040" cy="749808"/>
           </a:xfrm>
           <a:prstGeom prst="roundRect">
             <a:avLst>
-              <a:gd name="adj" fmla="val 8140"/>
+              <a:gd name="adj" fmla="val 8537"/>
             </a:avLst>
           </a:prstGeom>
           <a:solidFill>
-            <a:srgbClr val="7FB3D3"/>
+            <a:srgbClr val="CBD6DD"/>
           </a:solidFill>
           <a:ln/>
         </p:spPr>
@@ -1303,7 +1303,7 @@
             <a:r>
               <a:rPr lang="en-US" sz="1700" b="1" dirty="0">
                 <a:solidFill>
-                  <a:srgbClr val="FFFFFF"/>
+                  <a:srgbClr val="17313B"/>
                 </a:solidFill>
                 <a:latin typeface="Malgun Gothic" pitchFamily="34" charset="0"/>
                 <a:ea typeface="Malgun Gothic" pitchFamily="34" charset="-122"/>
@@ -1320,7 +1320,7 @@
             <a:r>
               <a:rPr lang="en-US" sz="1050" dirty="0">
                 <a:solidFill>
-                  <a:srgbClr val="FFFFFF"/>
+                  <a:srgbClr val="17313B"/>
                 </a:solidFill>
                 <a:latin typeface="Malgun Gothic" pitchFamily="34" charset="0"/>
                 <a:ea typeface="Malgun Gothic" pitchFamily="34" charset="-122"/>
@@ -1340,8 +1340,8 @@
         </p:nvSpPr>
         <p:spPr>
           <a:xfrm>
-            <a:off x="3858768" y="2157984"/>
-            <a:ext cx="274320" cy="786384"/>
+            <a:off x="3858768" y="2048256"/>
+            <a:ext cx="274320" cy="749808"/>
           </a:xfrm>
           <a:prstGeom prst="rect">
             <a:avLst/>
@@ -1359,7 +1359,7 @@
             <a:r>
               <a:rPr lang="en-US" sz="1400" dirty="0">
                 <a:solidFill>
-                  <a:srgbClr val="0E6BA8"/>
+                  <a:srgbClr val="5A7184"/>
                 </a:solidFill>
                 <a:latin typeface="Malgun Gothic" pitchFamily="34" charset="0"/>
                 <a:ea typeface="Malgun Gothic" pitchFamily="34" charset="-122"/>
@@ -1379,12 +1379,12 @@
         </p:nvSpPr>
         <p:spPr>
           <a:xfrm>
-            <a:off x="4114800" y="2157984"/>
-            <a:ext cx="1463040" cy="786384"/>
+            <a:off x="4114800" y="2048256"/>
+            <a:ext cx="1463040" cy="749808"/>
           </a:xfrm>
           <a:prstGeom prst="roundRect">
             <a:avLst>
-              <a:gd name="adj" fmla="val 8140"/>
+              <a:gd name="adj" fmla="val 8537"/>
             </a:avLst>
           </a:prstGeom>
           <a:solidFill>
@@ -1439,7 +1439,7 @@
         </p:nvSpPr>
         <p:spPr>
           <a:xfrm>
-            <a:off x="713232" y="3108960"/>
+            <a:off x="713232" y="2944368"/>
             <a:ext cx="4965192" cy="310896"/>
           </a:xfrm>
           <a:prstGeom prst="rect">
@@ -1456,17 +1456,17 @@
               <a:buNone/>
             </a:pPr>
             <a:r>
-              <a:rPr lang="en-US" sz="1300" dirty="0">
-                <a:solidFill>
-                  <a:srgbClr val="17313B"/>
-                </a:solidFill>
-                <a:latin typeface="Malgun Gothic" pitchFamily="34" charset="0"/>
-                <a:ea typeface="Malgun Gothic" pitchFamily="34" charset="-122"/>
-                <a:cs typeface="Malgun Gothic" pitchFamily="34" charset="-120"/>
-              </a:rPr>
-              <a:t>고객이 사는 것: 정확한 납품 → 공동 기술 드라이브</a:t>
-            </a:r>
-            <a:endParaRPr lang="en-US" sz="1300" dirty="0"/>
+              <a:rPr lang="en-US" sz="1200" dirty="0">
+                <a:solidFill>
+                  <a:srgbClr val="5A7184"/>
+                </a:solidFill>
+                <a:latin typeface="Malgun Gothic" pitchFamily="34" charset="0"/>
+                <a:ea typeface="Malgun Gothic" pitchFamily="34" charset="-122"/>
+                <a:cs typeface="Malgun Gothic" pitchFamily="34" charset="-120"/>
+              </a:rPr>
+              <a:t>고객이 사는 것: 납품 → 공동 기술 드라이브 · SCA 16건 · $100B</a:t>
+            </a:r>
+            <a:endParaRPr lang="en-US" sz="1200" dirty="0"/>
           </a:p>
         </p:txBody>
       </p:sp>
@@ -1478,16 +1478,16 @@
         </p:nvSpPr>
         <p:spPr>
           <a:xfrm>
-            <a:off x="6254496" y="1554480"/>
-            <a:ext cx="5477256" cy="2011680"/>
+            <a:off x="6254496" y="1517904"/>
+            <a:ext cx="5477256" cy="1865376"/>
           </a:xfrm>
           <a:prstGeom prst="roundRect">
             <a:avLst>
-              <a:gd name="adj" fmla="val 4091"/>
+              <a:gd name="adj" fmla="val 4412"/>
             </a:avLst>
           </a:prstGeom>
           <a:solidFill>
-            <a:srgbClr val="E6F4F4"/>
+            <a:srgbClr val="F5F7F8"/>
           </a:solidFill>
           <a:ln/>
         </p:spPr>
@@ -1500,14 +1500,14 @@
         </p:nvSpPr>
         <p:spPr>
           <a:xfrm>
-            <a:off x="6437376" y="1700784"/>
+            <a:off x="6437376" y="1645920"/>
             <a:ext cx="329184" cy="329184"/>
           </a:xfrm>
           <a:prstGeom prst="ellipse">
             <a:avLst/>
           </a:prstGeom>
           <a:solidFill>
-            <a:srgbClr val="028090"/>
+            <a:srgbClr val="17313B"/>
           </a:solidFill>
           <a:ln/>
         </p:spPr>
@@ -1541,7 +1541,7 @@
         </p:nvSpPr>
         <p:spPr>
           <a:xfrm>
-            <a:off x="6858000" y="1673352"/>
+            <a:off x="6858000" y="1618488"/>
             <a:ext cx="4754880" cy="365760"/>
           </a:xfrm>
           <a:prstGeom prst="rect">
@@ -1560,7 +1560,7 @@
             <a:r>
               <a:rPr lang="en-US" sz="1900" b="1" dirty="0">
                 <a:solidFill>
-                  <a:srgbClr val="028090"/>
+                  <a:srgbClr val="17313B"/>
                 </a:solidFill>
                 <a:latin typeface="Malgun Gothic" pitchFamily="34" charset="0"/>
                 <a:ea typeface="Malgun Gothic" pitchFamily="34" charset="-122"/>
@@ -1580,12 +1580,12 @@
         </p:nvSpPr>
         <p:spPr>
           <a:xfrm>
-            <a:off x="6473952" y="2139696"/>
-            <a:ext cx="1554480" cy="365760"/>
+            <a:off x="6473952" y="2029968"/>
+            <a:ext cx="1554480" cy="347472"/>
           </a:xfrm>
           <a:prstGeom prst="roundRect">
             <a:avLst>
-              <a:gd name="adj" fmla="val 12500"/>
+              <a:gd name="adj" fmla="val 13158"/>
             </a:avLst>
           </a:prstGeom>
           <a:solidFill>
@@ -1593,7 +1593,7 @@
           </a:solidFill>
           <a:ln w="12700">
             <a:solidFill>
-              <a:srgbClr val="D9E6EC"/>
+              <a:srgbClr val="DCE4E9"/>
             </a:solidFill>
           </a:ln>
         </p:spPr>
@@ -1627,8 +1627,8 @@
         </p:nvSpPr>
         <p:spPr>
           <a:xfrm>
-            <a:off x="8065008" y="2139696"/>
-            <a:ext cx="274320" cy="365760"/>
+            <a:off x="8065008" y="2029968"/>
+            <a:ext cx="274320" cy="347472"/>
           </a:xfrm>
           <a:prstGeom prst="rect">
             <a:avLst/>
@@ -1666,12 +1666,12 @@
         </p:nvSpPr>
         <p:spPr>
           <a:xfrm>
-            <a:off x="8357616" y="2139696"/>
-            <a:ext cx="3108960" cy="365760"/>
+            <a:off x="8357616" y="2029968"/>
+            <a:ext cx="3108960" cy="347472"/>
           </a:xfrm>
           <a:prstGeom prst="roundRect">
             <a:avLst>
-              <a:gd name="adj" fmla="val 12500"/>
+              <a:gd name="adj" fmla="val 13158"/>
             </a:avLst>
           </a:prstGeom>
           <a:solidFill>
@@ -1713,12 +1713,12 @@
         </p:nvSpPr>
         <p:spPr>
           <a:xfrm>
-            <a:off x="6473952" y="2596896"/>
-            <a:ext cx="1554480" cy="365760"/>
+            <a:off x="6473952" y="2468880"/>
+            <a:ext cx="1554480" cy="347472"/>
           </a:xfrm>
           <a:prstGeom prst="roundRect">
             <a:avLst>
-              <a:gd name="adj" fmla="val 12500"/>
+              <a:gd name="adj" fmla="val 13158"/>
             </a:avLst>
           </a:prstGeom>
           <a:solidFill>
@@ -1726,7 +1726,7 @@
           </a:solidFill>
           <a:ln w="12700">
             <a:solidFill>
-              <a:srgbClr val="D9E6EC"/>
+              <a:srgbClr val="DCE4E9"/>
             </a:solidFill>
           </a:ln>
         </p:spPr>
@@ -1760,8 +1760,8 @@
         </p:nvSpPr>
         <p:spPr>
           <a:xfrm>
-            <a:off x="8065008" y="2596896"/>
-            <a:ext cx="274320" cy="365760"/>
+            <a:off x="8065008" y="2468880"/>
+            <a:ext cx="274320" cy="347472"/>
           </a:xfrm>
           <a:prstGeom prst="rect">
             <a:avLst/>
@@ -1799,12 +1799,12 @@
         </p:nvSpPr>
         <p:spPr>
           <a:xfrm>
-            <a:off x="8357616" y="2596896"/>
-            <a:ext cx="3108960" cy="365760"/>
+            <a:off x="8357616" y="2468880"/>
+            <a:ext cx="3108960" cy="347472"/>
           </a:xfrm>
           <a:prstGeom prst="roundRect">
             <a:avLst>
-              <a:gd name="adj" fmla="val 12500"/>
+              <a:gd name="adj" fmla="val 13158"/>
             </a:avLst>
           </a:prstGeom>
           <a:solidFill>
@@ -1846,12 +1846,12 @@
         </p:nvSpPr>
         <p:spPr>
           <a:xfrm>
-            <a:off x="6473952" y="3054096"/>
-            <a:ext cx="1554480" cy="365760"/>
+            <a:off x="6473952" y="2907792"/>
+            <a:ext cx="1554480" cy="347472"/>
           </a:xfrm>
           <a:prstGeom prst="roundRect">
             <a:avLst>
-              <a:gd name="adj" fmla="val 12500"/>
+              <a:gd name="adj" fmla="val 13158"/>
             </a:avLst>
           </a:prstGeom>
           <a:solidFill>
@@ -1859,7 +1859,7 @@
           </a:solidFill>
           <a:ln w="12700">
             <a:solidFill>
-              <a:srgbClr val="D9E6EC"/>
+              <a:srgbClr val="DCE4E9"/>
             </a:solidFill>
           </a:ln>
         </p:spPr>
@@ -1893,8 +1893,8 @@
         </p:nvSpPr>
         <p:spPr>
           <a:xfrm>
-            <a:off x="8065008" y="3054096"/>
-            <a:ext cx="274320" cy="365760"/>
+            <a:off x="8065008" y="2907792"/>
+            <a:ext cx="274320" cy="347472"/>
           </a:xfrm>
           <a:prstGeom prst="rect">
             <a:avLst/>
@@ -1932,12 +1932,12 @@
         </p:nvSpPr>
         <p:spPr>
           <a:xfrm>
-            <a:off x="8357616" y="3054096"/>
-            <a:ext cx="3108960" cy="365760"/>
+            <a:off x="8357616" y="2907792"/>
+            <a:ext cx="3108960" cy="347472"/>
           </a:xfrm>
           <a:prstGeom prst="roundRect">
             <a:avLst>
-              <a:gd name="adj" fmla="val 12500"/>
+              <a:gd name="adj" fmla="val 13158"/>
             </a:avLst>
           </a:prstGeom>
           <a:solidFill>
@@ -1979,16 +1979,16 @@
         </p:nvSpPr>
         <p:spPr>
           <a:xfrm>
-            <a:off x="457200" y="3730752"/>
-            <a:ext cx="11274552" cy="1133856"/>
+            <a:off x="457200" y="3529584"/>
+            <a:ext cx="11274552" cy="1005840"/>
           </a:xfrm>
           <a:prstGeom prst="roundRect">
             <a:avLst>
-              <a:gd name="adj" fmla="val 7258"/>
+              <a:gd name="adj" fmla="val 8182"/>
             </a:avLst>
           </a:prstGeom>
           <a:solidFill>
-            <a:srgbClr val="E8F6F0"/>
+            <a:srgbClr val="F5F7F8"/>
           </a:solidFill>
           <a:ln/>
         </p:spPr>
@@ -2001,14 +2001,14 @@
         </p:nvSpPr>
         <p:spPr>
           <a:xfrm>
-            <a:off x="640080" y="3877056"/>
+            <a:off x="640080" y="3657600"/>
             <a:ext cx="329184" cy="329184"/>
           </a:xfrm>
           <a:prstGeom prst="ellipse">
             <a:avLst/>
           </a:prstGeom>
           <a:solidFill>
-            <a:srgbClr val="02A878"/>
+            <a:srgbClr val="17313B"/>
           </a:solidFill>
           <a:ln/>
         </p:spPr>
@@ -2042,8 +2042,8 @@
         </p:nvSpPr>
         <p:spPr>
           <a:xfrm>
-            <a:off x="1060704" y="3849624"/>
-            <a:ext cx="3108960" cy="365760"/>
+            <a:off x="1060704" y="3630168"/>
+            <a:ext cx="3017520" cy="365760"/>
           </a:xfrm>
           <a:prstGeom prst="rect">
             <a:avLst/>
@@ -2061,7 +2061,7 @@
             <a:r>
               <a:rPr lang="en-US" sz="1900" b="1" dirty="0">
                 <a:solidFill>
-                  <a:srgbClr val="02A878"/>
+                  <a:srgbClr val="17313B"/>
                 </a:solidFill>
                 <a:latin typeface="Malgun Gothic" pitchFamily="34" charset="0"/>
                 <a:ea typeface="Malgun Gothic" pitchFamily="34" charset="-122"/>
@@ -2081,14 +2081,14 @@
         </p:nvSpPr>
         <p:spPr>
           <a:xfrm>
-            <a:off x="4224528" y="3913632"/>
-            <a:ext cx="420624" cy="420624"/>
+            <a:off x="4114800" y="3657600"/>
+            <a:ext cx="384048" cy="384048"/>
           </a:xfrm>
           <a:prstGeom prst="ellipse">
             <a:avLst/>
           </a:prstGeom>
           <a:solidFill>
-            <a:srgbClr val="0E6BA8"/>
+            <a:srgbClr val="5A7184"/>
           </a:solidFill>
           <a:ln/>
         </p:spPr>
@@ -2109,8 +2109,8 @@
         </p:blipFill>
         <p:spPr>
           <a:xfrm>
-            <a:off x="4325478" y="4014582"/>
-            <a:ext cx="218724" cy="218724"/>
+            <a:off x="4206972" y="3749772"/>
+            <a:ext cx="199705" cy="199705"/>
           </a:xfrm>
           <a:prstGeom prst="rect">
             <a:avLst/>
@@ -2125,8 +2125,8 @@
         </p:nvSpPr>
         <p:spPr>
           <a:xfrm>
-            <a:off x="4718304" y="3895344"/>
-            <a:ext cx="1371600" cy="274320"/>
+            <a:off x="4572000" y="3621024"/>
+            <a:ext cx="1426464" cy="274320"/>
           </a:xfrm>
           <a:prstGeom prst="rect">
             <a:avLst/>
@@ -2142,7 +2142,7 @@
               <a:buNone/>
             </a:pPr>
             <a:r>
-              <a:rPr lang="en-US" sz="1450" b="1" dirty="0">
+              <a:rPr lang="en-US" sz="1400" b="1" dirty="0">
                 <a:solidFill>
                   <a:srgbClr val="17313B"/>
                 </a:solidFill>
@@ -2152,7 +2152,7 @@
               </a:rPr>
               <a:t>기술</a:t>
             </a:r>
-            <a:endParaRPr lang="en-US" sz="1450" dirty="0"/>
+            <a:endParaRPr lang="en-US" sz="1400" dirty="0"/>
           </a:p>
         </p:txBody>
       </p:sp>
@@ -2164,8 +2164,8 @@
         </p:nvSpPr>
         <p:spPr>
           <a:xfrm>
-            <a:off x="4718304" y="4169664"/>
-            <a:ext cx="1426464" cy="548640"/>
+            <a:off x="4572000" y="3895344"/>
+            <a:ext cx="1463040" cy="512064"/>
           </a:xfrm>
           <a:prstGeom prst="rect">
             <a:avLst/>
@@ -2206,14 +2206,14 @@
         </p:nvSpPr>
         <p:spPr>
           <a:xfrm>
-            <a:off x="6108192" y="3913632"/>
-            <a:ext cx="420624" cy="420624"/>
+            <a:off x="6035040" y="3657600"/>
+            <a:ext cx="384048" cy="384048"/>
           </a:xfrm>
           <a:prstGeom prst="ellipse">
             <a:avLst/>
           </a:prstGeom>
           <a:solidFill>
-            <a:srgbClr val="028090"/>
+            <a:srgbClr val="5A7184"/>
           </a:solidFill>
           <a:ln/>
         </p:spPr>
@@ -2234,8 +2234,8 @@
         </p:blipFill>
         <p:spPr>
           <a:xfrm>
-            <a:off x="6209142" y="4014582"/>
-            <a:ext cx="218724" cy="218724"/>
+            <a:off x="6127212" y="3749772"/>
+            <a:ext cx="199705" cy="199705"/>
           </a:xfrm>
           <a:prstGeom prst="rect">
             <a:avLst/>
@@ -2250,8 +2250,8 @@
         </p:nvSpPr>
         <p:spPr>
           <a:xfrm>
-            <a:off x="6601968" y="3895344"/>
-            <a:ext cx="1371600" cy="274320"/>
+            <a:off x="6492240" y="3621024"/>
+            <a:ext cx="1426464" cy="274320"/>
           </a:xfrm>
           <a:prstGeom prst="rect">
             <a:avLst/>
@@ -2267,7 +2267,7 @@
               <a:buNone/>
             </a:pPr>
             <a:r>
-              <a:rPr lang="en-US" sz="1450" b="1" dirty="0">
+              <a:rPr lang="en-US" sz="1400" b="1" dirty="0">
                 <a:solidFill>
                   <a:srgbClr val="17313B"/>
                 </a:solidFill>
@@ -2277,7 +2277,7 @@
               </a:rPr>
               <a:t>문화</a:t>
             </a:r>
-            <a:endParaRPr lang="en-US" sz="1450" dirty="0"/>
+            <a:endParaRPr lang="en-US" sz="1400" dirty="0"/>
           </a:p>
         </p:txBody>
       </p:sp>
@@ -2289,8 +2289,8 @@
         </p:nvSpPr>
         <p:spPr>
           <a:xfrm>
-            <a:off x="6601968" y="4169664"/>
-            <a:ext cx="1426464" cy="548640"/>
+            <a:off x="6492240" y="3895344"/>
+            <a:ext cx="1463040" cy="512064"/>
           </a:xfrm>
           <a:prstGeom prst="rect">
             <a:avLst/>
@@ -2317,7 +2317,7 @@
                 <a:ea typeface="Malgun Gothic" pitchFamily="34" charset="-122"/>
                 <a:cs typeface="Malgun Gothic" pitchFamily="34" charset="-120"/>
               </a:rPr>
-              <a:t>가설 제안 KPI · 스타 호명</a:t>
+              <a:t>모난 놈 → 호명 문화</a:t>
             </a:r>
             <a:endParaRPr lang="en-US" sz="1000" dirty="0"/>
           </a:p>
@@ -2331,14 +2331,14 @@
         </p:nvSpPr>
         <p:spPr>
           <a:xfrm>
-            <a:off x="7991856" y="3913632"/>
-            <a:ext cx="420624" cy="420624"/>
+            <a:off x="7955280" y="3657600"/>
+            <a:ext cx="384048" cy="384048"/>
           </a:xfrm>
           <a:prstGeom prst="ellipse">
             <a:avLst/>
           </a:prstGeom>
           <a:solidFill>
-            <a:srgbClr val="02A878"/>
+            <a:srgbClr val="5A7184"/>
           </a:solidFill>
           <a:ln/>
         </p:spPr>
@@ -2359,8 +2359,8 @@
         </p:blipFill>
         <p:spPr>
           <a:xfrm>
-            <a:off x="8092806" y="4014582"/>
-            <a:ext cx="218724" cy="218724"/>
+            <a:off x="8047452" y="3749772"/>
+            <a:ext cx="199705" cy="199705"/>
           </a:xfrm>
           <a:prstGeom prst="rect">
             <a:avLst/>
@@ -2375,8 +2375,8 @@
         </p:nvSpPr>
         <p:spPr>
           <a:xfrm>
-            <a:off x="8485632" y="3895344"/>
-            <a:ext cx="1371600" cy="274320"/>
+            <a:off x="8412480" y="3621024"/>
+            <a:ext cx="1426464" cy="274320"/>
           </a:xfrm>
           <a:prstGeom prst="rect">
             <a:avLst/>
@@ -2392,7 +2392,7 @@
               <a:buNone/>
             </a:pPr>
             <a:r>
-              <a:rPr lang="en-US" sz="1450" b="1" dirty="0">
+              <a:rPr lang="en-US" sz="1400" b="1" dirty="0">
                 <a:solidFill>
                   <a:srgbClr val="17313B"/>
                 </a:solidFill>
@@ -2402,7 +2402,7 @@
               </a:rPr>
               <a:t>조직</a:t>
             </a:r>
-            <a:endParaRPr lang="en-US" sz="1450" dirty="0"/>
+            <a:endParaRPr lang="en-US" sz="1400" dirty="0"/>
           </a:p>
         </p:txBody>
       </p:sp>
@@ -2414,8 +2414,8 @@
         </p:nvSpPr>
         <p:spPr>
           <a:xfrm>
-            <a:off x="8485632" y="4169664"/>
-            <a:ext cx="1426464" cy="548640"/>
+            <a:off x="8412480" y="3895344"/>
+            <a:ext cx="1463040" cy="512064"/>
           </a:xfrm>
           <a:prstGeom prst="rect">
             <a:avLst/>
@@ -2442,7 +2442,7 @@
                 <a:ea typeface="Malgun Gothic" pitchFamily="34" charset="-122"/>
                 <a:cs typeface="Malgun Gothic" pitchFamily="34" charset="-120"/>
               </a:rPr>
-              <a:t>Co-Design Pod · DE 트랙</a:t>
+              <a:t>DE 스타 · Co-Design Pod</a:t>
             </a:r>
             <a:endParaRPr lang="en-US" sz="1000" dirty="0"/>
           </a:p>
@@ -2456,14 +2456,14 @@
         </p:nvSpPr>
         <p:spPr>
           <a:xfrm>
-            <a:off x="9875520" y="3913632"/>
-            <a:ext cx="420624" cy="420624"/>
+            <a:off x="9875520" y="3657600"/>
+            <a:ext cx="384048" cy="384048"/>
           </a:xfrm>
           <a:prstGeom prst="ellipse">
             <a:avLst/>
           </a:prstGeom>
           <a:solidFill>
-            <a:srgbClr val="4C7C94"/>
+            <a:srgbClr val="5A7184"/>
           </a:solidFill>
           <a:ln/>
         </p:spPr>
@@ -2484,8 +2484,8 @@
         </p:blipFill>
         <p:spPr>
           <a:xfrm>
-            <a:off x="9976470" y="4014582"/>
-            <a:ext cx="218724" cy="218724"/>
+            <a:off x="9967692" y="3749772"/>
+            <a:ext cx="199705" cy="199705"/>
           </a:xfrm>
           <a:prstGeom prst="rect">
             <a:avLst/>
@@ -2500,8 +2500,8 @@
         </p:nvSpPr>
         <p:spPr>
           <a:xfrm>
-            <a:off x="10369296" y="3895344"/>
-            <a:ext cx="1371600" cy="274320"/>
+            <a:off x="10332720" y="3621024"/>
+            <a:ext cx="1426464" cy="274320"/>
           </a:xfrm>
           <a:prstGeom prst="rect">
             <a:avLst/>
@@ -2517,7 +2517,7 @@
               <a:buNone/>
             </a:pPr>
             <a:r>
-              <a:rPr lang="en-US" sz="1450" b="1" dirty="0">
+              <a:rPr lang="en-US" sz="1400" b="1" dirty="0">
                 <a:solidFill>
                   <a:srgbClr val="17313B"/>
                 </a:solidFill>
@@ -2527,7 +2527,7 @@
               </a:rPr>
               <a:t>방식</a:t>
             </a:r>
-            <a:endParaRPr lang="en-US" sz="1450" dirty="0"/>
+            <a:endParaRPr lang="en-US" sz="1400" dirty="0"/>
           </a:p>
         </p:txBody>
       </p:sp>
@@ -2539,8 +2539,8 @@
         </p:nvSpPr>
         <p:spPr>
           <a:xfrm>
-            <a:off x="10369296" y="4169664"/>
-            <a:ext cx="1426464" cy="548640"/>
+            <a:off x="10332720" y="3895344"/>
+            <a:ext cx="1463040" cy="512064"/>
           </a:xfrm>
           <a:prstGeom prst="rect">
             <a:avLst/>
@@ -2567,7 +2567,7 @@
                 <a:ea typeface="Malgun Gothic" pitchFamily="34" charset="-122"/>
                 <a:cs typeface="Malgun Gothic" pitchFamily="34" charset="-120"/>
               </a:rPr>
-              <a:t>교차 리뷰 · PoA · AI 내재화</a:t>
+              <a:t>교차 리뷰 · PoA · AI</a:t>
             </a:r>
             <a:endParaRPr lang="en-US" sz="1000" dirty="0"/>
           </a:p>
@@ -2581,7 +2581,120 @@
         </p:nvSpPr>
         <p:spPr>
           <a:xfrm>
-            <a:off x="1463040" y="5431536"/>
+            <a:off x="457200" y="4645152"/>
+            <a:ext cx="11274552" cy="676656"/>
+          </a:xfrm>
+          <a:prstGeom prst="roundRect">
+            <a:avLst>
+              <a:gd name="adj" fmla="val 10811"/>
+            </a:avLst>
+          </a:prstGeom>
+          <a:solidFill>
+            <a:srgbClr val="E8F6F0"/>
+          </a:solidFill>
+          <a:ln w="15875">
+            <a:solidFill>
+              <a:srgbClr val="02A878"/>
+            </a:solidFill>
+            <a:prstDash val="solid"/>
+          </a:ln>
+        </p:spPr>
+      </p:sp>
+      <p:pic>
+        <p:nvPicPr>
+          <p:cNvPr id="48" name="Image 4" descr="preencoded.png">    </p:cNvPr>
+          <p:cNvPicPr>
+            <a:picLocks noChangeAspect="1"/>
+          </p:cNvPicPr>
+          <p:nvPr/>
+        </p:nvPicPr>
+        <p:blipFill>
+          <a:blip r:embed="rId5"/>
+          <a:stretch>
+            <a:fillRect/>
+          </a:stretch>
+        </p:blipFill>
+        <p:spPr>
+          <a:xfrm>
+            <a:off x="640080" y="4800600"/>
+            <a:ext cx="365760" cy="365760"/>
+          </a:xfrm>
+          <a:prstGeom prst="rect">
+            <a:avLst/>
+          </a:prstGeom>
+        </p:spPr>
+      </p:pic>
+      <p:sp>
+        <p:nvSpPr>
+          <p:cNvPr id="49" name="Text 42"/>
+          <p:cNvSpPr/>
+          <p:nvPr/>
+        </p:nvSpPr>
+        <p:spPr>
+          <a:xfrm>
+            <a:off x="1133856" y="4645152"/>
+            <a:ext cx="10415016" cy="676656"/>
+          </a:xfrm>
+          <a:prstGeom prst="rect">
+            <a:avLst/>
+          </a:prstGeom>
+          <a:noFill/>
+          <a:ln/>
+        </p:spPr>
+        <p:txBody>
+          <a:bodyPr wrap="square" lIns="0" tIns="0" rIns="0" bIns="0" rtlCol="0" anchor="ctr"/>
+          <a:lstStyle/>
+          <a:p>
+            <a:pPr indent="0" marL="0">
+              <a:lnSpc>
+                <a:spcPct val="112000"/>
+              </a:lnSpc>
+              <a:buNone/>
+            </a:pPr>
+            <a:r>
+              <a:rPr lang="en-US" sz="1400" b="1" dirty="0">
+                <a:solidFill>
+                  <a:srgbClr val="17313B"/>
+                </a:solidFill>
+                <a:latin typeface="Malgun Gothic" pitchFamily="34" charset="0"/>
+                <a:ea typeface="Malgun Gothic" pitchFamily="34" charset="-122"/>
+                <a:cs typeface="Malgun Gothic" pitchFamily="34" charset="-120"/>
+              </a:rPr>
+              <a:t>핵심 — DE(Distinguished Engineer)를 스타 플레이어로, 고객사와 기술 생태계를 함께 만든다</a:t>
+            </a:r>
+            <a:endParaRPr lang="en-US" sz="1400" dirty="0"/>
+          </a:p>
+          <a:p>
+            <a:pPr indent="0" marL="0">
+              <a:lnSpc>
+                <a:spcPct val="112000"/>
+              </a:lnSpc>
+              <a:buNone/>
+            </a:pPr>
+            <a:r>
+              <a:rPr lang="en-US" sz="1100" dirty="0">
+                <a:solidFill>
+                  <a:srgbClr val="5A7184"/>
+                </a:solidFill>
+                <a:latin typeface="Malgun Gothic" pitchFamily="34" charset="0"/>
+                <a:ea typeface="Malgun Gothic" pitchFamily="34" charset="-122"/>
+                <a:cs typeface="Malgun Gothic" pitchFamily="34" charset="-120"/>
+              </a:rPr>
+              <a:t>‘모난 놈이 정 맞는’ 기존 문화 → 스타를 호명하고 드러내는 문화로 (호명사회) · 관리 보직 분리 + 실리콘밸리 현역 스타 영입</a:t>
+            </a:r>
+            <a:endParaRPr lang="en-US" sz="1400" dirty="0"/>
+          </a:p>
+        </p:txBody>
+      </p:sp>
+      <p:sp>
+        <p:nvSpPr>
+          <p:cNvPr id="50" name="Shape 43"/>
+          <p:cNvSpPr/>
+          <p:nvPr/>
+        </p:nvSpPr>
+        <p:spPr>
+          <a:xfrm>
+            <a:off x="1463040" y="5797296"/>
             <a:ext cx="9262872" cy="0"/>
           </a:xfrm>
           <a:prstGeom prst="line">
@@ -2590,7 +2703,7 @@
           <a:noFill/>
           <a:ln w="25400">
             <a:solidFill>
-              <a:srgbClr val="028090"/>
+              <a:srgbClr val="C4CFD6"/>
             </a:solidFill>
             <a:prstDash val="solid"/>
           </a:ln>
@@ -2598,34 +2711,34 @@
       </p:sp>
       <p:sp>
         <p:nvSpPr>
-          <p:cNvPr id="48" name="Shape 42"/>
-          <p:cNvSpPr/>
-          <p:nvPr/>
-        </p:nvSpPr>
-        <p:spPr>
-          <a:xfrm>
-            <a:off x="1380744" y="5349240"/>
+          <p:cNvPr id="51" name="Shape 44"/>
+          <p:cNvSpPr/>
+          <p:nvPr/>
+        </p:nvSpPr>
+        <p:spPr>
+          <a:xfrm>
+            <a:off x="1380744" y="5715000"/>
             <a:ext cx="164592" cy="164592"/>
           </a:xfrm>
           <a:prstGeom prst="ellipse">
             <a:avLst/>
           </a:prstGeom>
           <a:solidFill>
-            <a:srgbClr val="028090"/>
-          </a:solidFill>
-          <a:ln/>
-        </p:spPr>
-      </p:sp>
-      <p:sp>
-        <p:nvSpPr>
-          <p:cNvPr id="49" name="Text 43"/>
-          <p:cNvSpPr/>
-          <p:nvPr/>
-        </p:nvSpPr>
-        <p:spPr>
-          <a:xfrm>
-            <a:off x="45720" y="5047488"/>
-            <a:ext cx="2834640" cy="274320"/>
+            <a:srgbClr val="17313B"/>
+          </a:solidFill>
+          <a:ln/>
+        </p:spPr>
+      </p:sp>
+      <p:sp>
+        <p:nvSpPr>
+          <p:cNvPr id="52" name="Text 45"/>
+          <p:cNvSpPr/>
+          <p:nvPr/>
+        </p:nvSpPr>
+        <p:spPr>
+          <a:xfrm>
+            <a:off x="45720" y="5449824"/>
+            <a:ext cx="2834640" cy="256032"/>
           </a:xfrm>
           <a:prstGeom prst="rect">
             <a:avLst/>
@@ -2641,7 +2754,7 @@
               <a:buNone/>
             </a:pPr>
             <a:r>
-              <a:rPr lang="en-US" sz="1500" b="1" dirty="0">
+              <a:rPr lang="en-US" sz="1450" b="1" dirty="0">
                 <a:solidFill>
                   <a:srgbClr val="17313B"/>
                 </a:solidFill>
@@ -2651,20 +2764,20 @@
               </a:rPr>
               <a:t>90일 · 증명</a:t>
             </a:r>
-            <a:endParaRPr lang="en-US" sz="1500" dirty="0"/>
-          </a:p>
-        </p:txBody>
-      </p:sp>
-      <p:sp>
-        <p:nvSpPr>
-          <p:cNvPr id="50" name="Text 44"/>
-          <p:cNvSpPr/>
-          <p:nvPr/>
-        </p:nvSpPr>
-        <p:spPr>
-          <a:xfrm>
-            <a:off x="-137160" y="5596128"/>
-            <a:ext cx="3200400" cy="256032"/>
+            <a:endParaRPr lang="en-US" sz="1450" dirty="0"/>
+          </a:p>
+        </p:txBody>
+      </p:sp>
+      <p:sp>
+        <p:nvSpPr>
+          <p:cNvPr id="53" name="Text 46"/>
+          <p:cNvSpPr/>
+          <p:nvPr/>
+        </p:nvSpPr>
+        <p:spPr>
+          <a:xfrm>
+            <a:off x="-137160" y="5943600"/>
+            <a:ext cx="3200400" cy="237744"/>
           </a:xfrm>
           <a:prstGeom prst="rect">
             <a:avLst/>
@@ -2680,7 +2793,7 @@
               <a:buNone/>
             </a:pPr>
             <a:r>
-              <a:rPr lang="en-US" sz="1150" dirty="0">
+              <a:rPr lang="en-US" sz="1100" dirty="0">
                 <a:solidFill>
                   <a:srgbClr val="5A7184"/>
                 </a:solidFill>
@@ -2690,40 +2803,40 @@
               </a:rPr>
               <a:t>Co-Design Pod 1호 · 시스템 모델 v0.1</a:t>
             </a:r>
-            <a:endParaRPr lang="en-US" sz="1150" dirty="0"/>
-          </a:p>
-        </p:txBody>
-      </p:sp>
-      <p:sp>
-        <p:nvSpPr>
-          <p:cNvPr id="51" name="Shape 45"/>
-          <p:cNvSpPr/>
-          <p:nvPr/>
-        </p:nvSpPr>
-        <p:spPr>
-          <a:xfrm>
-            <a:off x="6016752" y="5349240"/>
+            <a:endParaRPr lang="en-US" sz="1100" dirty="0"/>
+          </a:p>
+        </p:txBody>
+      </p:sp>
+      <p:sp>
+        <p:nvSpPr>
+          <p:cNvPr id="54" name="Shape 47"/>
+          <p:cNvSpPr/>
+          <p:nvPr/>
+        </p:nvSpPr>
+        <p:spPr>
+          <a:xfrm>
+            <a:off x="6016752" y="5715000"/>
             <a:ext cx="164592" cy="164592"/>
           </a:xfrm>
           <a:prstGeom prst="ellipse">
             <a:avLst/>
           </a:prstGeom>
           <a:solidFill>
-            <a:srgbClr val="028090"/>
-          </a:solidFill>
-          <a:ln/>
-        </p:spPr>
-      </p:sp>
-      <p:sp>
-        <p:nvSpPr>
-          <p:cNvPr id="52" name="Text 46"/>
-          <p:cNvSpPr/>
-          <p:nvPr/>
-        </p:nvSpPr>
-        <p:spPr>
-          <a:xfrm>
-            <a:off x="4681728" y="5047488"/>
-            <a:ext cx="2834640" cy="274320"/>
+            <a:srgbClr val="17313B"/>
+          </a:solidFill>
+          <a:ln/>
+        </p:spPr>
+      </p:sp>
+      <p:sp>
+        <p:nvSpPr>
+          <p:cNvPr id="55" name="Text 48"/>
+          <p:cNvSpPr/>
+          <p:nvPr/>
+        </p:nvSpPr>
+        <p:spPr>
+          <a:xfrm>
+            <a:off x="4681728" y="5449824"/>
+            <a:ext cx="2834640" cy="256032"/>
           </a:xfrm>
           <a:prstGeom prst="rect">
             <a:avLst/>
@@ -2739,7 +2852,7 @@
               <a:buNone/>
             </a:pPr>
             <a:r>
-              <a:rPr lang="en-US" sz="1500" b="1" dirty="0">
+              <a:rPr lang="en-US" sz="1450" b="1" dirty="0">
                 <a:solidFill>
                   <a:srgbClr val="17313B"/>
                 </a:solidFill>
@@ -2749,20 +2862,20 @@
               </a:rPr>
               <a:t>1년 · 제도화</a:t>
             </a:r>
-            <a:endParaRPr lang="en-US" sz="1500" dirty="0"/>
-          </a:p>
-        </p:txBody>
-      </p:sp>
-      <p:sp>
-        <p:nvSpPr>
-          <p:cNvPr id="53" name="Text 47"/>
-          <p:cNvSpPr/>
-          <p:nvPr/>
-        </p:nvSpPr>
-        <p:spPr>
-          <a:xfrm>
-            <a:off x="4498848" y="5596128"/>
-            <a:ext cx="3200400" cy="256032"/>
+            <a:endParaRPr lang="en-US" sz="1450" dirty="0"/>
+          </a:p>
+        </p:txBody>
+      </p:sp>
+      <p:sp>
+        <p:nvSpPr>
+          <p:cNvPr id="56" name="Text 49"/>
+          <p:cNvSpPr/>
+          <p:nvPr/>
+        </p:nvSpPr>
+        <p:spPr>
+          <a:xfrm>
+            <a:off x="4498848" y="5943600"/>
+            <a:ext cx="3200400" cy="237744"/>
           </a:xfrm>
           <a:prstGeom prst="rect">
             <a:avLst/>
@@ -2778,7 +2891,7 @@
               <a:buNone/>
             </a:pPr>
             <a:r>
-              <a:rPr lang="en-US" sz="1150" dirty="0">
+              <a:rPr lang="en-US" sz="1100" dirty="0">
                 <a:solidFill>
                   <a:srgbClr val="5A7184"/>
                 </a:solidFill>
@@ -2788,40 +2901,40 @@
               </a:rPr>
               <a:t>Pod 3~5개 · SCA형 계약 1건</a:t>
             </a:r>
-            <a:endParaRPr lang="en-US" sz="1150" dirty="0"/>
-          </a:p>
-        </p:txBody>
-      </p:sp>
-      <p:sp>
-        <p:nvSpPr>
-          <p:cNvPr id="54" name="Shape 48"/>
-          <p:cNvSpPr/>
-          <p:nvPr/>
-        </p:nvSpPr>
-        <p:spPr>
-          <a:xfrm>
-            <a:off x="10643616" y="5349240"/>
+            <a:endParaRPr lang="en-US" sz="1100" dirty="0"/>
+          </a:p>
+        </p:txBody>
+      </p:sp>
+      <p:sp>
+        <p:nvSpPr>
+          <p:cNvPr id="57" name="Shape 50"/>
+          <p:cNvSpPr/>
+          <p:nvPr/>
+        </p:nvSpPr>
+        <p:spPr>
+          <a:xfrm>
+            <a:off x="10643616" y="5715000"/>
             <a:ext cx="164592" cy="164592"/>
           </a:xfrm>
           <a:prstGeom prst="ellipse">
             <a:avLst/>
           </a:prstGeom>
           <a:solidFill>
-            <a:srgbClr val="028090"/>
-          </a:solidFill>
-          <a:ln/>
-        </p:spPr>
-      </p:sp>
-      <p:sp>
-        <p:nvSpPr>
-          <p:cNvPr id="55" name="Text 49"/>
-          <p:cNvSpPr/>
-          <p:nvPr/>
-        </p:nvSpPr>
-        <p:spPr>
-          <a:xfrm>
-            <a:off x="9308592" y="5047488"/>
-            <a:ext cx="2834640" cy="274320"/>
+            <a:srgbClr val="17313B"/>
+          </a:solidFill>
+          <a:ln/>
+        </p:spPr>
+      </p:sp>
+      <p:sp>
+        <p:nvSpPr>
+          <p:cNvPr id="58" name="Text 51"/>
+          <p:cNvSpPr/>
+          <p:nvPr/>
+        </p:nvSpPr>
+        <p:spPr>
+          <a:xfrm>
+            <a:off x="9308592" y="5449824"/>
+            <a:ext cx="2834640" cy="256032"/>
           </a:xfrm>
           <a:prstGeom prst="rect">
             <a:avLst/>
@@ -2837,7 +2950,7 @@
               <a:buNone/>
             </a:pPr>
             <a:r>
-              <a:rPr lang="en-US" sz="1500" b="1" dirty="0">
+              <a:rPr lang="en-US" sz="1450" b="1" dirty="0">
                 <a:solidFill>
                   <a:srgbClr val="17313B"/>
                 </a:solidFill>
@@ -2847,20 +2960,20 @@
               </a:rPr>
               <a:t>3년 · 표준화</a:t>
             </a:r>
-            <a:endParaRPr lang="en-US" sz="1500" dirty="0"/>
-          </a:p>
-        </p:txBody>
-      </p:sp>
-      <p:sp>
-        <p:nvSpPr>
-          <p:cNvPr id="56" name="Text 50"/>
-          <p:cNvSpPr/>
-          <p:nvPr/>
-        </p:nvSpPr>
-        <p:spPr>
-          <a:xfrm>
-            <a:off x="9125712" y="5596128"/>
-            <a:ext cx="3200400" cy="256032"/>
+            <a:endParaRPr lang="en-US" sz="1450" dirty="0"/>
+          </a:p>
+        </p:txBody>
+      </p:sp>
+      <p:sp>
+        <p:nvSpPr>
+          <p:cNvPr id="59" name="Text 52"/>
+          <p:cNvSpPr/>
+          <p:nvPr/>
+        </p:nvSpPr>
+        <p:spPr>
+          <a:xfrm>
+            <a:off x="9125712" y="5943600"/>
+            <a:ext cx="3200400" cy="237744"/>
           </a:xfrm>
           <a:prstGeom prst="rect">
             <a:avLst/>
@@ -2876,7 +2989,7 @@
               <a:buNone/>
             </a:pPr>
             <a:r>
-              <a:rPr lang="en-US" sz="1150" dirty="0">
+              <a:rPr lang="en-US" sz="1100" dirty="0">
                 <a:solidFill>
                   <a:srgbClr val="5A7184"/>
                 </a:solidFill>
@@ -2886,46 +2999,7 @@
               </a:rPr>
               <a:t>설계 플랫폼 · 커스텀 매출 30%+</a:t>
             </a:r>
-            <a:endParaRPr lang="en-US" sz="1150" dirty="0"/>
-          </a:p>
-        </p:txBody>
-      </p:sp>
-      <p:sp>
-        <p:nvSpPr>
-          <p:cNvPr id="57" name="Text 51"/>
-          <p:cNvSpPr/>
-          <p:nvPr/>
-        </p:nvSpPr>
-        <p:spPr>
-          <a:xfrm>
-            <a:off x="457200" y="6053328"/>
-            <a:ext cx="11274552" cy="274320"/>
-          </a:xfrm>
-          <a:prstGeom prst="rect">
-            <a:avLst/>
-          </a:prstGeom>
-          <a:noFill/>
-          <a:ln/>
-        </p:spPr>
-        <p:txBody>
-          <a:bodyPr wrap="square" lIns="0" tIns="0" rIns="0" bIns="0" rtlCol="0" anchor="ctr"/>
-          <a:lstStyle/>
-          <a:p>
-            <a:pPr algn="ctr" indent="0" marL="0">
-              <a:buNone/>
-            </a:pPr>
-            <a:r>
-              <a:rPr lang="en-US" sz="1200" dirty="0">
-                <a:solidFill>
-                  <a:srgbClr val="5A7184"/>
-                </a:solidFill>
-                <a:latin typeface="Malgun Gothic" pitchFamily="34" charset="0"/>
-                <a:ea typeface="Malgun Gothic" pitchFamily="34" charset="-122"/>
-                <a:cs typeface="Malgun Gothic" pitchFamily="34" charset="-120"/>
-              </a:rPr>
-              <a:t>SCA 16건 · 최소 계약매출 $100B · 예치금 $22B — Micron IR (2026-06)</a:t>
-            </a:r>
-            <a:endParaRPr lang="en-US" sz="1200" dirty="0"/>
+            <a:endParaRPr lang="en-US" sz="1100" dirty="0"/>
           </a:p>
         </p:txBody>
       </p:sp>

--- a/outputs/presentation/dev-transformation-summary-mid.pptx
+++ b/outputs/presentation/dev-transformation-summary-mid.pptx
@@ -2680,7 +2680,7 @@
                 <a:ea typeface="Malgun Gothic" pitchFamily="34" charset="-122"/>
                 <a:cs typeface="Malgun Gothic" pitchFamily="34" charset="-120"/>
               </a:rPr>
-              <a:t>‘모난 놈이 정 맞는’ 기존 문화 → 스타를 호명하고 드러내는 문화로 (호명사회) · 관리 보직 분리 + 실리콘밸리 현역 스타 영입</a:t>
+              <a:t>“조직 이름 뒤에 숨지 않고 자기 이름으로 불린다” — 송길영 『호명사회』 · ‘모난 놈이 정 맞는’ 문화 → 호명 문화로 · 관리 분리 + SV 영입</a:t>
             </a:r>
             <a:endParaRPr lang="en-US" sz="1400" dirty="0"/>
           </a:p>

--- a/outputs/presentation/dev-transformation-summary-mid.pptx
+++ b/outputs/presentation/dev-transformation-summary-mid.pptx
@@ -1181,8 +1181,8 @@
         </p:nvSpPr>
         <p:spPr>
           <a:xfrm>
-            <a:off x="713232" y="2048256"/>
-            <a:ext cx="1463040" cy="749808"/>
+            <a:off x="676656" y="2048256"/>
+            <a:ext cx="1051560" cy="749808"/>
           </a:xfrm>
           <a:prstGeom prst="roundRect">
             <a:avLst>
@@ -1202,7 +1202,7 @@
               <a:buNone/>
             </a:pPr>
             <a:r>
-              <a:rPr lang="en-US" sz="1700" b="1" dirty="0">
+              <a:rPr lang="en-US" sz="1500" b="1" dirty="0">
                 <a:solidFill>
                   <a:srgbClr val="5A7184"/>
                 </a:solidFill>
@@ -1212,7 +1212,7 @@
               </a:rPr>
               <a:t>Spot</a:t>
             </a:r>
-            <a:endParaRPr lang="en-US" sz="1700" dirty="0"/>
+            <a:endParaRPr lang="en-US" sz="1500" dirty="0"/>
           </a:p>
           <a:p>
             <a:pPr algn="ctr" indent="0" marL="0">
@@ -1229,7 +1229,7 @@
               </a:rPr>
               <a:t>현물 거래</a:t>
             </a:r>
-            <a:endParaRPr lang="en-US" sz="1700" dirty="0"/>
+            <a:endParaRPr lang="en-US" sz="1500" dirty="0"/>
           </a:p>
         </p:txBody>
       </p:sp>
@@ -1241,8 +1241,8 @@
         </p:nvSpPr>
         <p:spPr>
           <a:xfrm>
-            <a:off x="2157984" y="2048256"/>
-            <a:ext cx="274320" cy="749808"/>
+            <a:off x="1728216" y="2048256"/>
+            <a:ext cx="237744" cy="749808"/>
           </a:xfrm>
           <a:prstGeom prst="rect">
             <a:avLst/>
@@ -1280,8 +1280,8 @@
         </p:nvSpPr>
         <p:spPr>
           <a:xfrm>
-            <a:off x="2414016" y="2048256"/>
-            <a:ext cx="1463040" cy="749808"/>
+            <a:off x="1965960" y="2048256"/>
+            <a:ext cx="1234440" cy="749808"/>
           </a:xfrm>
           <a:prstGeom prst="roundRect">
             <a:avLst>
@@ -1301,7 +1301,7 @@
               <a:buNone/>
             </a:pPr>
             <a:r>
-              <a:rPr lang="en-US" sz="1700" b="1" dirty="0">
+              <a:rPr lang="en-US" sz="1500" b="1" dirty="0">
                 <a:solidFill>
                   <a:srgbClr val="17313B"/>
                 </a:solidFill>
@@ -1311,7 +1311,7 @@
               </a:rPr>
               <a:t>LTA</a:t>
             </a:r>
-            <a:endParaRPr lang="en-US" sz="1700" dirty="0"/>
+            <a:endParaRPr lang="en-US" sz="1500" dirty="0"/>
           </a:p>
           <a:p>
             <a:pPr algn="ctr" indent="0" marL="0">
@@ -1328,7 +1328,7 @@
               </a:rPr>
               <a:t>물량·가격 락인</a:t>
             </a:r>
-            <a:endParaRPr lang="en-US" sz="1700" dirty="0"/>
+            <a:endParaRPr lang="en-US" sz="1500" dirty="0"/>
           </a:p>
         </p:txBody>
       </p:sp>
@@ -1340,8 +1340,8 @@
         </p:nvSpPr>
         <p:spPr>
           <a:xfrm>
-            <a:off x="3858768" y="2048256"/>
-            <a:ext cx="274320" cy="749808"/>
+            <a:off x="3200400" y="2048256"/>
+            <a:ext cx="237744" cy="749808"/>
           </a:xfrm>
           <a:prstGeom prst="rect">
             <a:avLst/>
@@ -1379,8 +1379,8 @@
         </p:nvSpPr>
         <p:spPr>
           <a:xfrm>
-            <a:off x="4114800" y="2048256"/>
-            <a:ext cx="1463040" cy="749808"/>
+            <a:off x="3438144" y="2048256"/>
+            <a:ext cx="2286000" cy="749808"/>
           </a:xfrm>
           <a:prstGeom prst="roundRect">
             <a:avLst>
@@ -1400,7 +1400,7 @@
               <a:buNone/>
             </a:pPr>
             <a:r>
-              <a:rPr lang="en-US" sz="1700" b="1" dirty="0">
+              <a:rPr lang="en-US" sz="1500" b="1" dirty="0">
                 <a:solidFill>
                   <a:srgbClr val="FFFFFF"/>
                 </a:solidFill>
@@ -1408,9 +1408,9 @@
                 <a:ea typeface="Malgun Gothic" pitchFamily="34" charset="-122"/>
                 <a:cs typeface="Malgun Gothic" pitchFamily="34" charset="-120"/>
               </a:rPr>
-              <a:t>SCA</a:t>
-            </a:r>
-            <a:endParaRPr lang="en-US" sz="1700" dirty="0"/>
+              <a:t>전략적 고객 계약</a:t>
+            </a:r>
+            <a:endParaRPr lang="en-US" sz="1500" dirty="0"/>
           </a:p>
           <a:p>
             <a:pPr algn="ctr" indent="0" marL="0">
@@ -1427,7 +1427,7 @@
               </a:rPr>
               <a:t>공동설계·자본 연계</a:t>
             </a:r>
-            <a:endParaRPr lang="en-US" sz="1700" dirty="0"/>
+            <a:endParaRPr lang="en-US" sz="1500" dirty="0"/>
           </a:p>
         </p:txBody>
       </p:sp>
@@ -1464,7 +1464,7 @@
                 <a:ea typeface="Malgun Gothic" pitchFamily="34" charset="-122"/>
                 <a:cs typeface="Malgun Gothic" pitchFamily="34" charset="-120"/>
               </a:rPr>
-              <a:t>고객이 사는 것: 납품 → 공동 기술 드라이브 · SCA 16건 · $100B</a:t>
+              <a:t>고객이 사는 것: 납품 → 공동 기술 드라이브 (16건 · $100B)</a:t>
             </a:r>
             <a:endParaRPr lang="en-US" sz="1200" dirty="0"/>
           </a:p>
@@ -2442,7 +2442,7 @@
                 <a:ea typeface="Malgun Gothic" pitchFamily="34" charset="-122"/>
                 <a:cs typeface="Malgun Gothic" pitchFamily="34" charset="-120"/>
               </a:rPr>
-              <a:t>DE 스타 · Co-Design Pod</a:t>
+              <a:t>FDE 스타 · Co-Design Pod</a:t>
             </a:r>
             <a:endParaRPr lang="en-US" sz="1000" dirty="0"/>
           </a:p>
@@ -2660,7 +2660,7 @@
                 <a:ea typeface="Malgun Gothic" pitchFamily="34" charset="-122"/>
                 <a:cs typeface="Malgun Gothic" pitchFamily="34" charset="-120"/>
               </a:rPr>
-              <a:t>핵심 — DE(Distinguished Engineer)를 스타 플레이어로, 고객사와 기술 생태계를 함께 만든다</a:t>
+              <a:t>핵심 — FDE(Forward Deployed Engineer)를 스타 플레이어로, 고객사와 기술 생태계를 함께 만든다</a:t>
             </a:r>
             <a:endParaRPr lang="en-US" sz="1400" dirty="0"/>
           </a:p>
@@ -2899,7 +2899,7 @@
                 <a:ea typeface="Malgun Gothic" pitchFamily="34" charset="-122"/>
                 <a:cs typeface="Malgun Gothic" pitchFamily="34" charset="-120"/>
               </a:rPr>
-              <a:t>Pod 3~5개 · SCA형 계약 1건</a:t>
+              <a:t>Pod 3~5개 · 전략적 고객 계약 1건</a:t>
             </a:r>
             <a:endParaRPr lang="en-US" sz="1100" dirty="0"/>
           </a:p>

--- a/outputs/presentation/dev-transformation-summary-mid.pptx
+++ b/outputs/presentation/dev-transformation-summary-mid.pptx
@@ -2694,51 +2694,180 @@
         </p:nvSpPr>
         <p:spPr>
           <a:xfrm>
-            <a:off x="1463040" y="5797296"/>
-            <a:ext cx="9262872" cy="0"/>
-          </a:xfrm>
-          <a:prstGeom prst="line">
+            <a:off x="457200" y="5449824"/>
+            <a:ext cx="11274552" cy="914400"/>
+          </a:xfrm>
+          <a:prstGeom prst="roundRect">
+            <a:avLst>
+              <a:gd name="adj" fmla="val 9000"/>
+            </a:avLst>
+          </a:prstGeom>
+          <a:solidFill>
+            <a:srgbClr val="F5F7F8"/>
+          </a:solidFill>
+          <a:ln/>
+        </p:spPr>
+      </p:sp>
+      <p:sp>
+        <p:nvSpPr>
+          <p:cNvPr id="51" name="Text 44"/>
+          <p:cNvSpPr/>
+          <p:nvPr/>
+        </p:nvSpPr>
+        <p:spPr>
+          <a:xfrm>
+            <a:off x="640080" y="5742432"/>
+            <a:ext cx="329184" cy="329184"/>
+          </a:xfrm>
+          <a:prstGeom prst="ellipse">
+            <a:avLst/>
+          </a:prstGeom>
+          <a:solidFill>
+            <a:srgbClr val="17313B"/>
+          </a:solidFill>
+          <a:ln/>
+        </p:spPr>
+        <p:txBody>
+          <a:bodyPr wrap="square" lIns="0" tIns="0" rIns="0" bIns="0" rtlCol="0" anchor="ctr"/>
+          <a:lstStyle/>
+          <a:p>
+            <a:pPr algn="ctr" indent="0" marL="0">
+              <a:buNone/>
+            </a:pPr>
+            <a:r>
+              <a:rPr lang="en-US" sz="1500" b="1" dirty="0">
+                <a:solidFill>
+                  <a:srgbClr val="FFFFFF"/>
+                </a:solidFill>
+                <a:latin typeface="Malgun Gothic" pitchFamily="34" charset="0"/>
+                <a:ea typeface="Malgun Gothic" pitchFamily="34" charset="-122"/>
+                <a:cs typeface="Malgun Gothic" pitchFamily="34" charset="-120"/>
+              </a:rPr>
+              <a:t>4</a:t>
+            </a:r>
+            <a:endParaRPr lang="en-US" sz="1500" dirty="0"/>
+          </a:p>
+        </p:txBody>
+      </p:sp>
+      <p:sp>
+        <p:nvSpPr>
+          <p:cNvPr id="52" name="Text 45"/>
+          <p:cNvSpPr/>
+          <p:nvPr/>
+        </p:nvSpPr>
+        <p:spPr>
+          <a:xfrm>
+            <a:off x="1060704" y="5715000"/>
+            <a:ext cx="3017520" cy="365760"/>
+          </a:xfrm>
+          <a:prstGeom prst="rect">
             <a:avLst/>
           </a:prstGeom>
           <a:noFill/>
-          <a:ln w="25400">
+          <a:ln/>
+        </p:spPr>
+        <p:txBody>
+          <a:bodyPr wrap="square" lIns="0" tIns="0" rIns="0" bIns="0" rtlCol="0" anchor="ctr"/>
+          <a:lstStyle/>
+          <a:p>
+            <a:pPr indent="0" marL="0">
+              <a:buNone/>
+            </a:pPr>
+            <a:r>
+              <a:rPr lang="en-US" sz="1700" b="1" dirty="0">
+                <a:solidFill>
+                  <a:srgbClr val="17313B"/>
+                </a:solidFill>
+                <a:latin typeface="Malgun Gothic" pitchFamily="34" charset="0"/>
+                <a:ea typeface="Malgun Gothic" pitchFamily="34" charset="-122"/>
+                <a:cs typeface="Malgun Gothic" pitchFamily="34" charset="-120"/>
+              </a:rPr>
+              <a:t>환경 변화 — 영입 가능한 임금</a:t>
+            </a:r>
+            <a:endParaRPr lang="en-US" sz="1700" dirty="0"/>
+          </a:p>
+        </p:txBody>
+      </p:sp>
+      <p:sp>
+        <p:nvSpPr>
+          <p:cNvPr id="53" name="Text 46"/>
+          <p:cNvSpPr/>
+          <p:nvPr/>
+        </p:nvSpPr>
+        <p:spPr>
+          <a:xfrm>
+            <a:off x="4114800" y="5605272"/>
+            <a:ext cx="2103120" cy="603504"/>
+          </a:xfrm>
+          <a:prstGeom prst="roundRect">
+            <a:avLst>
+              <a:gd name="adj" fmla="val 9091"/>
+            </a:avLst>
+          </a:prstGeom>
+          <a:solidFill>
+            <a:srgbClr val="E7ECEF"/>
+          </a:solidFill>
+          <a:ln w="12700">
             <a:solidFill>
-              <a:srgbClr val="C4CFD6"/>
+              <a:srgbClr val="DCE4E9"/>
             </a:solidFill>
-            <a:prstDash val="solid"/>
           </a:ln>
         </p:spPr>
-      </p:sp>
-      <p:sp>
-        <p:nvSpPr>
-          <p:cNvPr id="51" name="Shape 44"/>
-          <p:cNvSpPr/>
-          <p:nvPr/>
-        </p:nvSpPr>
-        <p:spPr>
-          <a:xfrm>
-            <a:off x="1380744" y="5715000"/>
-            <a:ext cx="164592" cy="164592"/>
-          </a:xfrm>
-          <a:prstGeom prst="ellipse">
-            <a:avLst/>
-          </a:prstGeom>
-          <a:solidFill>
-            <a:srgbClr val="17313B"/>
-          </a:solidFill>
-          <a:ln/>
-        </p:spPr>
-      </p:sp>
-      <p:sp>
-        <p:nvSpPr>
-          <p:cNvPr id="52" name="Text 45"/>
-          <p:cNvSpPr/>
-          <p:nvPr/>
-        </p:nvSpPr>
-        <p:spPr>
-          <a:xfrm>
-            <a:off x="45720" y="5449824"/>
-            <a:ext cx="2834640" cy="256032"/>
+        <p:txBody>
+          <a:bodyPr wrap="square" lIns="0" tIns="0" rIns="0" bIns="0" rtlCol="0" anchor="ctr"/>
+          <a:lstStyle/>
+          <a:p>
+            <a:pPr algn="ctr" indent="0" marL="0">
+              <a:lnSpc>
+                <a:spcPct val="105000"/>
+              </a:lnSpc>
+              <a:buNone/>
+            </a:pPr>
+            <a:r>
+              <a:rPr lang="en-US" sz="1250" b="1" dirty="0">
+                <a:solidFill>
+                  <a:srgbClr val="5A7184"/>
+                </a:solidFill>
+                <a:latin typeface="Malgun Gothic" pitchFamily="34" charset="0"/>
+                <a:ea typeface="Malgun Gothic" pitchFamily="34" charset="-122"/>
+                <a:cs typeface="Malgun Gothic" pitchFamily="34" charset="-120"/>
+              </a:rPr>
+              <a:t>과거</a:t>
+            </a:r>
+            <a:endParaRPr lang="en-US" sz="1250" dirty="0"/>
+          </a:p>
+          <a:p>
+            <a:pPr algn="ctr" indent="0" marL="0">
+              <a:lnSpc>
+                <a:spcPct val="105000"/>
+              </a:lnSpc>
+              <a:buNone/>
+            </a:pPr>
+            <a:r>
+              <a:rPr lang="en-US" sz="1000" dirty="0">
+                <a:solidFill>
+                  <a:srgbClr val="5A7184"/>
+                </a:solidFill>
+                <a:latin typeface="Malgun Gothic" pitchFamily="34" charset="0"/>
+                <a:ea typeface="Malgun Gothic" pitchFamily="34" charset="-122"/>
+                <a:cs typeface="Malgun Gothic" pitchFamily="34" charset="-120"/>
+              </a:rPr>
+              <a:t>실리콘밸리 보상 열위</a:t>
+            </a:r>
+            <a:endParaRPr lang="en-US" sz="1250" dirty="0"/>
+          </a:p>
+        </p:txBody>
+      </p:sp>
+      <p:sp>
+        <p:nvSpPr>
+          <p:cNvPr id="54" name="Text 47"/>
+          <p:cNvSpPr/>
+          <p:nvPr/>
+        </p:nvSpPr>
+        <p:spPr>
+          <a:xfrm>
+            <a:off x="6217920" y="5605272"/>
+            <a:ext cx="219456" cy="603504"/>
           </a:xfrm>
           <a:prstGeom prst="rect">
             <a:avLst/>
@@ -2754,7 +2883,57 @@
               <a:buNone/>
             </a:pPr>
             <a:r>
-              <a:rPr lang="en-US" sz="1450" b="1" dirty="0">
+              <a:rPr lang="en-US" sz="1200" dirty="0">
+                <a:solidFill>
+                  <a:srgbClr val="5A7184"/>
+                </a:solidFill>
+                <a:latin typeface="Malgun Gothic" pitchFamily="34" charset="0"/>
+                <a:ea typeface="Malgun Gothic" pitchFamily="34" charset="-122"/>
+                <a:cs typeface="Malgun Gothic" pitchFamily="34" charset="-120"/>
+              </a:rPr>
+              <a:t>▶</a:t>
+            </a:r>
+            <a:endParaRPr lang="en-US" sz="1200" dirty="0"/>
+          </a:p>
+        </p:txBody>
+      </p:sp>
+      <p:sp>
+        <p:nvSpPr>
+          <p:cNvPr id="55" name="Text 48"/>
+          <p:cNvSpPr/>
+          <p:nvPr/>
+        </p:nvSpPr>
+        <p:spPr>
+          <a:xfrm>
+            <a:off x="6437376" y="5605272"/>
+            <a:ext cx="2651760" cy="603504"/>
+          </a:xfrm>
+          <a:prstGeom prst="roundRect">
+            <a:avLst>
+              <a:gd name="adj" fmla="val 9091"/>
+            </a:avLst>
+          </a:prstGeom>
+          <a:solidFill>
+            <a:srgbClr val="FFFFFF"/>
+          </a:solidFill>
+          <a:ln w="12700">
+            <a:solidFill>
+              <a:srgbClr val="DCE4E9"/>
+            </a:solidFill>
+          </a:ln>
+        </p:spPr>
+        <p:txBody>
+          <a:bodyPr wrap="square" lIns="0" tIns="0" rIns="0" bIns="0" rtlCol="0" anchor="ctr"/>
+          <a:lstStyle/>
+          <a:p>
+            <a:pPr algn="ctr" indent="0" marL="0">
+              <a:lnSpc>
+                <a:spcPct val="105000"/>
+              </a:lnSpc>
+              <a:buNone/>
+            </a:pPr>
+            <a:r>
+              <a:rPr lang="en-US" sz="1250" b="1" dirty="0">
                 <a:solidFill>
                   <a:srgbClr val="17313B"/>
                 </a:solidFill>
@@ -2762,22 +2941,42 @@
                 <a:ea typeface="Malgun Gothic" pitchFamily="34" charset="-122"/>
                 <a:cs typeface="Malgun Gothic" pitchFamily="34" charset="-120"/>
               </a:rPr>
-              <a:t>90일 · 증명</a:t>
-            </a:r>
-            <a:endParaRPr lang="en-US" sz="1450" dirty="0"/>
-          </a:p>
-        </p:txBody>
-      </p:sp>
-      <p:sp>
-        <p:nvSpPr>
-          <p:cNvPr id="53" name="Text 46"/>
-          <p:cNvSpPr/>
-          <p:nvPr/>
-        </p:nvSpPr>
-        <p:spPr>
-          <a:xfrm>
-            <a:off x="-137160" y="5943600"/>
-            <a:ext cx="3200400" cy="237744"/>
+              <a:t>현재</a:t>
+            </a:r>
+            <a:endParaRPr lang="en-US" sz="1250" dirty="0"/>
+          </a:p>
+          <a:p>
+            <a:pPr algn="ctr" indent="0" marL="0">
+              <a:lnSpc>
+                <a:spcPct val="105000"/>
+              </a:lnSpc>
+              <a:buNone/>
+            </a:pPr>
+            <a:r>
+              <a:rPr lang="en-US" sz="1000" dirty="0">
+                <a:solidFill>
+                  <a:srgbClr val="5A7184"/>
+                </a:solidFill>
+                <a:latin typeface="Malgun Gothic" pitchFamily="34" charset="0"/>
+                <a:ea typeface="Malgun Gothic" pitchFamily="34" charset="-122"/>
+                <a:cs typeface="Malgun Gothic" pitchFamily="34" charset="-120"/>
+              </a:rPr>
+              <a:t>성과급 ~6억 · 상한 철폐</a:t>
+            </a:r>
+            <a:endParaRPr lang="en-US" sz="1250" dirty="0"/>
+          </a:p>
+        </p:txBody>
+      </p:sp>
+      <p:sp>
+        <p:nvSpPr>
+          <p:cNvPr id="56" name="Text 49"/>
+          <p:cNvSpPr/>
+          <p:nvPr/>
+        </p:nvSpPr>
+        <p:spPr>
+          <a:xfrm>
+            <a:off x="9089136" y="5605272"/>
+            <a:ext cx="219456" cy="603504"/>
           </a:xfrm>
           <a:prstGeom prst="rect">
             <a:avLst/>
@@ -2793,7 +2992,7 @@
               <a:buNone/>
             </a:pPr>
             <a:r>
-              <a:rPr lang="en-US" sz="1100" dirty="0">
+              <a:rPr lang="en-US" sz="1200" dirty="0">
                 <a:solidFill>
                   <a:srgbClr val="5A7184"/>
                 </a:solidFill>
@@ -2801,58 +3000,49 @@
                 <a:ea typeface="Malgun Gothic" pitchFamily="34" charset="-122"/>
                 <a:cs typeface="Malgun Gothic" pitchFamily="34" charset="-120"/>
               </a:rPr>
-              <a:t>Co-Design Pod 1호 · 시스템 모델 v0.1</a:t>
-            </a:r>
-            <a:endParaRPr lang="en-US" sz="1100" dirty="0"/>
-          </a:p>
-        </p:txBody>
-      </p:sp>
-      <p:sp>
-        <p:nvSpPr>
-          <p:cNvPr id="54" name="Shape 47"/>
-          <p:cNvSpPr/>
-          <p:nvPr/>
-        </p:nvSpPr>
-        <p:spPr>
-          <a:xfrm>
-            <a:off x="6016752" y="5715000"/>
-            <a:ext cx="164592" cy="164592"/>
-          </a:xfrm>
-          <a:prstGeom prst="ellipse">
-            <a:avLst/>
-          </a:prstGeom>
-          <a:solidFill>
-            <a:srgbClr val="17313B"/>
-          </a:solidFill>
-          <a:ln/>
-        </p:spPr>
-      </p:sp>
-      <p:sp>
-        <p:nvSpPr>
-          <p:cNvPr id="55" name="Text 48"/>
-          <p:cNvSpPr/>
-          <p:nvPr/>
-        </p:nvSpPr>
-        <p:spPr>
-          <a:xfrm>
-            <a:off x="4681728" y="5449824"/>
-            <a:ext cx="2834640" cy="256032"/>
-          </a:xfrm>
-          <a:prstGeom prst="rect">
-            <a:avLst/>
-          </a:prstGeom>
-          <a:noFill/>
-          <a:ln/>
+              <a:t>▶</a:t>
+            </a:r>
+            <a:endParaRPr lang="en-US" sz="1200" dirty="0"/>
+          </a:p>
+        </p:txBody>
+      </p:sp>
+      <p:sp>
+        <p:nvSpPr>
+          <p:cNvPr id="57" name="Text 50"/>
+          <p:cNvSpPr/>
+          <p:nvPr/>
+        </p:nvSpPr>
+        <p:spPr>
+          <a:xfrm>
+            <a:off x="9308592" y="5605272"/>
+            <a:ext cx="2286000" cy="603504"/>
+          </a:xfrm>
+          <a:prstGeom prst="roundRect">
+            <a:avLst>
+              <a:gd name="adj" fmla="val 9091"/>
+            </a:avLst>
+          </a:prstGeom>
+          <a:solidFill>
+            <a:srgbClr val="E8F6F0"/>
+          </a:solidFill>
+          <a:ln w="15875">
+            <a:solidFill>
+              <a:srgbClr val="02A878"/>
+            </a:solidFill>
+          </a:ln>
         </p:spPr>
         <p:txBody>
           <a:bodyPr wrap="square" lIns="0" tIns="0" rIns="0" bIns="0" rtlCol="0" anchor="ctr"/>
           <a:lstStyle/>
           <a:p>
             <a:pPr algn="ctr" indent="0" marL="0">
-              <a:buNone/>
-            </a:pPr>
-            <a:r>
-              <a:rPr lang="en-US" sz="1450" b="1" dirty="0">
+              <a:lnSpc>
+                <a:spcPct val="105000"/>
+              </a:lnSpc>
+              <a:buNone/>
+            </a:pPr>
+            <a:r>
+              <a:rPr lang="en-US" sz="1250" b="1" dirty="0">
                 <a:solidFill>
                   <a:srgbClr val="17313B"/>
                 </a:solidFill>
@@ -2860,38 +3050,19 @@
                 <a:ea typeface="Malgun Gothic" pitchFamily="34" charset="-122"/>
                 <a:cs typeface="Malgun Gothic" pitchFamily="34" charset="-120"/>
               </a:rPr>
-              <a:t>1년 · 제도화</a:t>
-            </a:r>
-            <a:endParaRPr lang="en-US" sz="1450" dirty="0"/>
-          </a:p>
-        </p:txBody>
-      </p:sp>
-      <p:sp>
-        <p:nvSpPr>
-          <p:cNvPr id="56" name="Text 49"/>
-          <p:cNvSpPr/>
-          <p:nvPr/>
-        </p:nvSpPr>
-        <p:spPr>
-          <a:xfrm>
-            <a:off x="4498848" y="5943600"/>
-            <a:ext cx="3200400" cy="237744"/>
-          </a:xfrm>
-          <a:prstGeom prst="rect">
-            <a:avLst/>
-          </a:prstGeom>
-          <a:noFill/>
-          <a:ln/>
-        </p:spPr>
-        <p:txBody>
-          <a:bodyPr wrap="square" lIns="0" tIns="0" rIns="0" bIns="0" rtlCol="0" anchor="ctr"/>
-          <a:lstStyle/>
+              <a:t>선순환</a:t>
+            </a:r>
+            <a:endParaRPr lang="en-US" sz="1250" dirty="0"/>
+          </a:p>
           <a:p>
             <a:pPr algn="ctr" indent="0" marL="0">
-              <a:buNone/>
-            </a:pPr>
-            <a:r>
-              <a:rPr lang="en-US" sz="1100" dirty="0">
+              <a:lnSpc>
+                <a:spcPct val="105000"/>
+              </a:lnSpc>
+              <a:buNone/>
+            </a:pPr>
+            <a:r>
+              <a:rPr lang="en-US" sz="1000" dirty="0">
                 <a:solidFill>
                   <a:srgbClr val="5A7184"/>
                 </a:solidFill>
@@ -2899,107 +3070,9 @@
                 <a:ea typeface="Malgun Gothic" pitchFamily="34" charset="-122"/>
                 <a:cs typeface="Malgun Gothic" pitchFamily="34" charset="-120"/>
               </a:rPr>
-              <a:t>Pod 3~5개 · 전략적 고객 계약 1건</a:t>
-            </a:r>
-            <a:endParaRPr lang="en-US" sz="1100" dirty="0"/>
-          </a:p>
-        </p:txBody>
-      </p:sp>
-      <p:sp>
-        <p:nvSpPr>
-          <p:cNvPr id="57" name="Shape 50"/>
-          <p:cNvSpPr/>
-          <p:nvPr/>
-        </p:nvSpPr>
-        <p:spPr>
-          <a:xfrm>
-            <a:off x="10643616" y="5715000"/>
-            <a:ext cx="164592" cy="164592"/>
-          </a:xfrm>
-          <a:prstGeom prst="ellipse">
-            <a:avLst/>
-          </a:prstGeom>
-          <a:solidFill>
-            <a:srgbClr val="17313B"/>
-          </a:solidFill>
-          <a:ln/>
-        </p:spPr>
-      </p:sp>
-      <p:sp>
-        <p:nvSpPr>
-          <p:cNvPr id="58" name="Text 51"/>
-          <p:cNvSpPr/>
-          <p:nvPr/>
-        </p:nvSpPr>
-        <p:spPr>
-          <a:xfrm>
-            <a:off x="9308592" y="5449824"/>
-            <a:ext cx="2834640" cy="256032"/>
-          </a:xfrm>
-          <a:prstGeom prst="rect">
-            <a:avLst/>
-          </a:prstGeom>
-          <a:noFill/>
-          <a:ln/>
-        </p:spPr>
-        <p:txBody>
-          <a:bodyPr wrap="square" lIns="0" tIns="0" rIns="0" bIns="0" rtlCol="0" anchor="ctr"/>
-          <a:lstStyle/>
-          <a:p>
-            <a:pPr algn="ctr" indent="0" marL="0">
-              <a:buNone/>
-            </a:pPr>
-            <a:r>
-              <a:rPr lang="en-US" sz="1450" b="1" dirty="0">
-                <a:solidFill>
-                  <a:srgbClr val="17313B"/>
-                </a:solidFill>
-                <a:latin typeface="Malgun Gothic" pitchFamily="34" charset="0"/>
-                <a:ea typeface="Malgun Gothic" pitchFamily="34" charset="-122"/>
-                <a:cs typeface="Malgun Gothic" pitchFamily="34" charset="-120"/>
-              </a:rPr>
-              <a:t>3년 · 표준화</a:t>
-            </a:r>
-            <a:endParaRPr lang="en-US" sz="1450" dirty="0"/>
-          </a:p>
-        </p:txBody>
-      </p:sp>
-      <p:sp>
-        <p:nvSpPr>
-          <p:cNvPr id="59" name="Text 52"/>
-          <p:cNvSpPr/>
-          <p:nvPr/>
-        </p:nvSpPr>
-        <p:spPr>
-          <a:xfrm>
-            <a:off x="9125712" y="5943600"/>
-            <a:ext cx="3200400" cy="237744"/>
-          </a:xfrm>
-          <a:prstGeom prst="rect">
-            <a:avLst/>
-          </a:prstGeom>
-          <a:noFill/>
-          <a:ln/>
-        </p:spPr>
-        <p:txBody>
-          <a:bodyPr wrap="square" lIns="0" tIns="0" rIns="0" bIns="0" rtlCol="0" anchor="ctr"/>
-          <a:lstStyle/>
-          <a:p>
-            <a:pPr algn="ctr" indent="0" marL="0">
-              <a:buNone/>
-            </a:pPr>
-            <a:r>
-              <a:rPr lang="en-US" sz="1100" dirty="0">
-                <a:solidFill>
-                  <a:srgbClr val="5A7184"/>
-                </a:solidFill>
-                <a:latin typeface="Malgun Gothic" pitchFamily="34" charset="0"/>
-                <a:ea typeface="Malgun Gothic" pitchFamily="34" charset="-122"/>
-                <a:cs typeface="Malgun Gothic" pitchFamily="34" charset="-120"/>
-              </a:rPr>
-              <a:t>설계 플랫폼 · 커스텀 매출 30%+</a:t>
-            </a:r>
-            <a:endParaRPr lang="en-US" sz="1100" dirty="0"/>
+              <a:t>영입 축적 → 조직 수준 상향</a:t>
+            </a:r>
+            <a:endParaRPr lang="en-US" sz="1250" dirty="0"/>
           </a:p>
         </p:txBody>
       </p:sp>

--- a/outputs/presentation/dev-transformation-summary-mid.pptx
+++ b/outputs/presentation/dev-transformation-summary-mid.pptx
@@ -877,7 +877,7 @@
         <p:spPr>
           <a:xfrm>
             <a:off x="457200" y="237744"/>
-            <a:ext cx="9692640" cy="566928"/>
+            <a:ext cx="9994392" cy="566928"/>
           </a:xfrm>
           <a:prstGeom prst="rect">
             <a:avLst/>
